--- a/media/resources/files/Onduktar_KemituuBingo_na3FcyT.pptx
+++ b/media/resources/files/Onduktar_KemituuBingo_na3FcyT.pptx
@@ -37021,7 +37021,7 @@
             </a:pPr>
             <a:r>
               <a:rPr lang="ru-RU" dirty="0"/>
-              <a:t>Турдуу пикирлер учун ыраазычылык билдиребиз.</a:t>
+              <a:t>Түрдүү пикирлер үчүн ыраазычылык билдиребиз.</a:t>
             </a:r>
           </a:p>
           <a:p>

--- a/media/resources/files/Onduktar_KemituuBingo_na3FcyT.pptx
+++ b/media/resources/files/Onduktar_KemituuBingo_na3FcyT.pptx
@@ -10031,7 +10031,7 @@
                 <a:ea typeface="+mn-ea"/>
                 <a:cs typeface="+mn-cs"/>
               </a:rPr>
-              <a:t> – Бинго ,жооптору менен</a:t>
+              <a:t> – Бинго,жооптору менен</a:t>
             </a:r>
             <a:endParaRPr kumimoji="0" lang="en-US" sz="1800" b="0" i="0" u="none" strike="noStrike" kern="1200" cap="none" spc="0" normalizeH="0" baseline="0" noProof="0" dirty="0">
               <a:ln>
@@ -10114,7 +10114,7 @@
                 <a:ea typeface="+mn-ea"/>
                 <a:cs typeface="+mn-cs"/>
               </a:rPr>
-              <a:t>Окуучулар </a:t>
+              <a:t>Окуучулар тордон тогуз жоопту тандап, дептердеги 3х3 чакмакка каалагандай коюшат.</a:t>
             </a:r>
             <a:r>
               <a:rPr kumimoji="0" lang="ru-RU" sz="2000" b="0" i="0" u="none" strike="noStrike" kern="1200" cap="none" spc="0" normalizeH="0" baseline="0" noProof="0" dirty="0">
@@ -10131,7 +10131,7 @@
                 <a:ea typeface="+mn-ea"/>
                 <a:cs typeface="+mn-cs"/>
               </a:rPr>
-              <a:t>суроо</a:t>
+              <a:t/>
             </a:r>
             <a:r>
               <a:rPr kumimoji="0" lang="en-US" sz="2000" b="0" i="0" u="none" strike="noStrike" kern="1200" cap="none" spc="0" normalizeH="0" baseline="0" noProof="0" dirty="0">
@@ -10148,7 +10148,7 @@
                 <a:ea typeface="+mn-ea"/>
                 <a:cs typeface="+mn-cs"/>
               </a:rPr>
-              <a:t> </a:t>
+              <a:t/>
             </a:r>
             <a:r>
               <a:rPr kumimoji="0" lang="en-US" sz="2000" b="0" i="0" u="none" strike="noStrike" kern="1200" cap="none" spc="0" normalizeH="0" baseline="0" noProof="0" dirty="0" err="1">
@@ -10165,7 +10165,7 @@
                 <a:ea typeface="+mn-ea"/>
                 <a:cs typeface="+mn-cs"/>
               </a:rPr>
-              <a:t>тордон</a:t>
+              <a:t/>
             </a:r>
             <a:r>
               <a:rPr kumimoji="0" lang="en-US" sz="2000" b="0" i="0" u="none" strike="noStrike" kern="1200" cap="none" spc="0" normalizeH="0" baseline="0" noProof="0" dirty="0">
@@ -10182,7 +10182,7 @@
                 <a:ea typeface="+mn-ea"/>
                 <a:cs typeface="+mn-cs"/>
               </a:rPr>
-              <a:t> </a:t>
+              <a:t/>
             </a:r>
             <a:r>
               <a:rPr kumimoji="0" lang="en-US" sz="1800" b="0" i="0" u="none" strike="noStrike" kern="1200" cap="none" spc="0" normalizeH="0" baseline="0" noProof="0" dirty="0" err="1">
@@ -10199,7 +10199,7 @@
                 <a:ea typeface="+mn-ea"/>
                 <a:cs typeface="+mn-cs"/>
               </a:rPr>
-              <a:t>тогуз</a:t>
+              <a:t/>
             </a:r>
             <a:r>
               <a:rPr kumimoji="0" lang="en-US" sz="1800" b="0" i="0" u="none" strike="noStrike" kern="1200" cap="none" spc="0" normalizeH="0" baseline="0" noProof="0" dirty="0">
@@ -10216,7 +10216,7 @@
                 <a:ea typeface="+mn-ea"/>
                 <a:cs typeface="+mn-cs"/>
               </a:rPr>
-              <a:t> </a:t>
+              <a:t/>
             </a:r>
             <a:r>
               <a:rPr kumimoji="0" lang="en-US" sz="1800" b="0" i="0" u="none" strike="noStrike" kern="1200" cap="none" spc="0" normalizeH="0" baseline="0" noProof="0" dirty="0" err="1">
@@ -10233,7 +10233,7 @@
                 <a:ea typeface="+mn-ea"/>
                 <a:cs typeface="+mn-cs"/>
               </a:rPr>
-              <a:t>жоопту</a:t>
+              <a:t/>
             </a:r>
             <a:r>
               <a:rPr kumimoji="0" lang="en-US" sz="1800" b="0" i="0" u="none" strike="noStrike" kern="1200" cap="none" spc="0" normalizeH="0" baseline="0" noProof="0" dirty="0">
@@ -10250,7 +10250,7 @@
                 <a:ea typeface="+mn-ea"/>
                 <a:cs typeface="+mn-cs"/>
               </a:rPr>
-              <a:t> </a:t>
+              <a:t/>
             </a:r>
             <a:r>
               <a:rPr kumimoji="0" lang="en-US" sz="1800" b="0" i="0" u="none" strike="noStrike" kern="1200" cap="none" spc="0" normalizeH="0" baseline="0" noProof="0" dirty="0" err="1">
@@ -10267,7 +10267,7 @@
                 <a:ea typeface="+mn-ea"/>
                 <a:cs typeface="+mn-cs"/>
               </a:rPr>
-              <a:t>тандап</a:t>
+              <a:t/>
             </a:r>
             <a:r>
               <a:rPr kumimoji="0" lang="en-US" sz="1800" b="0" i="0" u="none" strike="noStrike" kern="1200" cap="none" spc="0" normalizeH="0" baseline="0" noProof="0" dirty="0">
@@ -10284,7 +10284,7 @@
                 <a:ea typeface="+mn-ea"/>
                 <a:cs typeface="+mn-cs"/>
               </a:rPr>
-              <a:t>, </a:t>
+              <a:t/>
             </a:r>
             <a:r>
               <a:rPr kumimoji="0" lang="en-US" sz="1800" b="0" i="0" u="none" strike="noStrike" kern="1200" cap="none" spc="0" normalizeH="0" baseline="0" noProof="0" dirty="0" err="1">
@@ -10301,7 +10301,7 @@
                 <a:ea typeface="+mn-ea"/>
                 <a:cs typeface="+mn-cs"/>
               </a:rPr>
-              <a:t>аларды</a:t>
+              <a:t/>
             </a:r>
             <a:r>
               <a:rPr kumimoji="0" lang="en-US" sz="1800" b="0" i="0" u="none" strike="noStrike" kern="1200" cap="none" spc="0" normalizeH="0" baseline="0" noProof="0" dirty="0">
@@ -10318,7 +10318,7 @@
                 <a:ea typeface="+mn-ea"/>
                 <a:cs typeface="+mn-cs"/>
               </a:rPr>
-              <a:t> </a:t>
+              <a:t/>
             </a:r>
             <a:r>
               <a:rPr kumimoji="0" lang="ru-RU" sz="1800" b="0" i="0" u="none" strike="noStrike" kern="1200" cap="none" spc="0" normalizeH="0" baseline="0" noProof="0" dirty="0">
@@ -10335,7 +10335,7 @@
                 <a:ea typeface="+mn-ea"/>
                 <a:cs typeface="+mn-cs"/>
               </a:rPr>
-              <a:t>дептериндеги</a:t>
+              <a:t/>
             </a:r>
             <a:r>
               <a:rPr kumimoji="0" lang="en-US" sz="1800" b="0" i="0" u="none" strike="noStrike" kern="1200" cap="none" spc="0" normalizeH="0" baseline="0" noProof="0" dirty="0">
@@ -10352,7 +10352,7 @@
                 <a:ea typeface="+mn-ea"/>
                 <a:cs typeface="+mn-cs"/>
               </a:rPr>
-              <a:t> 3х3 </a:t>
+              <a:t/>
             </a:r>
             <a:r>
               <a:rPr kumimoji="0" lang="en-US" sz="1800" b="0" i="0" u="none" strike="noStrike" kern="1200" cap="none" spc="0" normalizeH="0" baseline="0" noProof="0" dirty="0" err="1">
@@ -10369,7 +10369,7 @@
                 <a:ea typeface="+mn-ea"/>
                 <a:cs typeface="+mn-cs"/>
               </a:rPr>
-              <a:t>квадратка</a:t>
+              <a:t/>
             </a:r>
             <a:r>
               <a:rPr kumimoji="0" lang="en-US" sz="1800" b="0" i="0" u="none" strike="noStrike" kern="1200" cap="none" spc="0" normalizeH="0" baseline="0" noProof="0" dirty="0">
@@ -10386,7 +10386,7 @@
                 <a:ea typeface="+mn-ea"/>
                 <a:cs typeface="+mn-cs"/>
               </a:rPr>
-              <a:t> </a:t>
+              <a:t/>
             </a:r>
             <a:r>
               <a:rPr kumimoji="0" lang="en-US" sz="1800" b="0" i="0" u="none" strike="noStrike" kern="1200" cap="none" spc="0" normalizeH="0" baseline="0" noProof="0" dirty="0" err="1">
@@ -10403,7 +10403,7 @@
                 <a:ea typeface="+mn-ea"/>
                 <a:cs typeface="+mn-cs"/>
               </a:rPr>
-              <a:t>туш</a:t>
+              <a:t/>
             </a:r>
             <a:r>
               <a:rPr kumimoji="0" lang="en-US" sz="1800" b="0" i="0" u="none" strike="noStrike" kern="1200" cap="none" spc="0" normalizeH="0" baseline="0" noProof="0" dirty="0">
@@ -10420,7 +10420,7 @@
                 <a:ea typeface="+mn-ea"/>
                 <a:cs typeface="+mn-cs"/>
               </a:rPr>
-              <a:t> </a:t>
+              <a:t/>
             </a:r>
             <a:r>
               <a:rPr kumimoji="0" lang="en-US" sz="1800" b="0" i="0" u="none" strike="noStrike" kern="1200" cap="none" spc="0" normalizeH="0" baseline="0" noProof="0" dirty="0" err="1">
@@ -10437,7 +10437,7 @@
                 <a:ea typeface="+mn-ea"/>
                 <a:cs typeface="+mn-cs"/>
               </a:rPr>
-              <a:t>келди</a:t>
+              <a:t/>
             </a:r>
             <a:r>
               <a:rPr kumimoji="0" lang="en-US" sz="1800" b="0" i="0" u="none" strike="noStrike" kern="1200" cap="none" spc="0" normalizeH="0" baseline="0" noProof="0" dirty="0">
@@ -10454,7 +10454,7 @@
                 <a:ea typeface="+mn-ea"/>
                 <a:cs typeface="+mn-cs"/>
               </a:rPr>
-              <a:t> </a:t>
+              <a:t/>
             </a:r>
             <a:r>
               <a:rPr kumimoji="0" lang="en-US" sz="1800" b="0" i="0" u="none" strike="noStrike" kern="1200" cap="none" spc="0" normalizeH="0" baseline="0" noProof="0" dirty="0" err="1">
@@ -10471,7 +10471,7 @@
                 <a:ea typeface="+mn-ea"/>
                 <a:cs typeface="+mn-cs"/>
               </a:rPr>
-              <a:t>жайгаштырышы</a:t>
+              <a:t/>
             </a:r>
             <a:r>
               <a:rPr kumimoji="0" lang="en-US" sz="1800" b="0" i="0" u="none" strike="noStrike" kern="1200" cap="none" spc="0" normalizeH="0" baseline="0" noProof="0" dirty="0">
@@ -10488,7 +10488,7 @@
                 <a:ea typeface="+mn-ea"/>
                 <a:cs typeface="+mn-cs"/>
               </a:rPr>
-              <a:t> </a:t>
+              <a:t/>
             </a:r>
             <a:r>
               <a:rPr kumimoji="0" lang="en-US" sz="1800" b="0" i="0" u="none" strike="noStrike" kern="1200" cap="none" spc="0" normalizeH="0" baseline="0" noProof="0" dirty="0" err="1">
@@ -10505,7 +10505,7 @@
                 <a:ea typeface="+mn-ea"/>
                 <a:cs typeface="+mn-cs"/>
               </a:rPr>
-              <a:t>керек</a:t>
+              <a:t/>
             </a:r>
             <a:r>
               <a:rPr kumimoji="0" lang="en-US" sz="1800" b="0" i="0" u="none" strike="noStrike" kern="1200" cap="none" spc="0" normalizeH="0" baseline="0" noProof="0" dirty="0">
@@ -10522,7 +10522,7 @@
                 <a:ea typeface="+mn-ea"/>
                 <a:cs typeface="+mn-cs"/>
               </a:rPr>
-              <a:t>.</a:t>
+              <a:t/>
             </a:r>
           </a:p>
           <a:p>
@@ -12943,7 +12943,7 @@
                   <a:schemeClr val="tx1"/>
                 </a:solidFill>
               </a:rPr>
-              <a:t>5.4</a:t>
+              <a:t>5,4</a:t>
             </a:r>
           </a:p>
         </p:txBody>
@@ -14491,7 +14491,7 @@
                   <a:schemeClr val="tx1"/>
                 </a:solidFill>
               </a:rPr>
-              <a:t>7.3</a:t>
+              <a:t>7,3</a:t>
             </a:r>
           </a:p>
         </p:txBody>
@@ -16039,7 +16039,7 @@
                   <a:schemeClr val="tx1"/>
                 </a:solidFill>
               </a:rPr>
-              <a:t>2.9</a:t>
+              <a:t>2,9</a:t>
             </a:r>
           </a:p>
         </p:txBody>
@@ -17587,7 +17587,7 @@
                   <a:schemeClr val="tx1"/>
                 </a:solidFill>
               </a:rPr>
-              <a:t>6.1</a:t>
+              <a:t>6,1</a:t>
             </a:r>
           </a:p>
         </p:txBody>
@@ -19135,7 +19135,7 @@
                   <a:schemeClr val="tx1"/>
                 </a:solidFill>
               </a:rPr>
-              <a:t>1.7</a:t>
+              <a:t>1,7</a:t>
             </a:r>
           </a:p>
         </p:txBody>
@@ -20683,7 +20683,7 @@
                   <a:schemeClr val="tx1"/>
                 </a:solidFill>
               </a:rPr>
-              <a:t>1.6</a:t>
+              <a:t>1,6</a:t>
             </a:r>
           </a:p>
         </p:txBody>
@@ -22231,7 +22231,7 @@
                   <a:schemeClr val="tx1"/>
                 </a:solidFill>
               </a:rPr>
-              <a:t>7.2</a:t>
+              <a:t>7,2</a:t>
             </a:r>
           </a:p>
         </p:txBody>
@@ -23779,7 +23779,7 @@
                   <a:schemeClr val="tx1"/>
                 </a:solidFill>
               </a:rPr>
-              <a:t>2.6</a:t>
+              <a:t>2,6</a:t>
             </a:r>
           </a:p>
         </p:txBody>
@@ -25327,7 +25327,7 @@
                   <a:schemeClr val="tx1"/>
                 </a:solidFill>
               </a:rPr>
-              <a:t>4.3</a:t>
+              <a:t>4,3</a:t>
             </a:r>
           </a:p>
         </p:txBody>
@@ -26875,7 +26875,7 @@
                   <a:schemeClr val="tx1"/>
                 </a:solidFill>
               </a:rPr>
-              <a:t>2.5</a:t>
+              <a:t>2,5</a:t>
             </a:r>
           </a:p>
         </p:txBody>
@@ -37176,7 +37176,7 @@
                           <a:ea typeface="+mn-ea"/>
                           <a:cs typeface="+mn-cs"/>
                         </a:rPr>
-                        <a:t>5.0</a:t>
+                        <a:t>5,0</a:t>
                       </a:r>
                     </a:p>
                   </a:txBody>
@@ -37259,7 +37259,7 @@
                           <a:ea typeface="+mn-ea"/>
                           <a:cs typeface="+mn-cs"/>
                         </a:rPr>
-                        <a:t>0.7</a:t>
+                        <a:t>0,7</a:t>
                       </a:r>
                     </a:p>
                   </a:txBody>
@@ -37342,7 +37342,7 @@
                           <a:ea typeface="+mn-ea"/>
                           <a:cs typeface="+mn-cs"/>
                         </a:rPr>
-                        <a:t>7.3</a:t>
+                        <a:t>7,3</a:t>
                       </a:r>
                     </a:p>
                   </a:txBody>
@@ -37425,7 +37425,7 @@
                           <a:ea typeface="+mn-ea"/>
                           <a:cs typeface="+mn-cs"/>
                         </a:rPr>
-                        <a:t>0.4</a:t>
+                        <a:t>0,4</a:t>
                       </a:r>
                     </a:p>
                   </a:txBody>
@@ -37515,7 +37515,7 @@
                           <a:ea typeface="+mn-ea"/>
                           <a:cs typeface="+mn-cs"/>
                         </a:rPr>
-                        <a:t>7.2</a:t>
+                        <a:t>7,2</a:t>
                       </a:r>
                     </a:p>
                   </a:txBody>
@@ -37598,7 +37598,7 @@
                           <a:ea typeface="+mn-ea"/>
                           <a:cs typeface="+mn-cs"/>
                         </a:rPr>
-                        <a:t>2.6</a:t>
+                        <a:t>2,6</a:t>
                       </a:r>
                     </a:p>
                   </a:txBody>
@@ -37681,7 +37681,7 @@
                           <a:ea typeface="+mn-ea"/>
                           <a:cs typeface="+mn-cs"/>
                         </a:rPr>
-                        <a:t>0.9</a:t>
+                        <a:t>0,9</a:t>
                       </a:r>
                     </a:p>
                   </a:txBody>
@@ -37764,7 +37764,7 @@
                           <a:ea typeface="+mn-ea"/>
                           <a:cs typeface="+mn-cs"/>
                         </a:rPr>
-                        <a:t>5.3</a:t>
+                        <a:t>5,3</a:t>
                       </a:r>
                     </a:p>
                   </a:txBody>
@@ -37854,7 +37854,7 @@
                           <a:ea typeface="+mn-ea"/>
                           <a:cs typeface="+mn-cs"/>
                         </a:rPr>
-                        <a:t>1.6</a:t>
+                        <a:t>1,6</a:t>
                       </a:r>
                     </a:p>
                   </a:txBody>
@@ -37937,7 +37937,7 @@
                           <a:ea typeface="+mn-ea"/>
                           <a:cs typeface="+mn-cs"/>
                         </a:rPr>
-                        <a:t>6.4</a:t>
+                        <a:t>6,4</a:t>
                       </a:r>
                     </a:p>
                   </a:txBody>
@@ -38020,7 +38020,7 @@
                           <a:ea typeface="+mn-ea"/>
                           <a:cs typeface="+mn-cs"/>
                         </a:rPr>
-                        <a:t>1.7</a:t>
+                        <a:t>1,7</a:t>
                       </a:r>
                     </a:p>
                   </a:txBody>
@@ -38103,7 +38103,7 @@
                           <a:ea typeface="+mn-ea"/>
                           <a:cs typeface="+mn-cs"/>
                         </a:rPr>
-                        <a:t>6.1</a:t>
+                        <a:t>6,1</a:t>
                       </a:r>
                     </a:p>
                   </a:txBody>
@@ -38193,7 +38193,7 @@
                           <a:ea typeface="+mn-ea"/>
                           <a:cs typeface="+mn-cs"/>
                         </a:rPr>
-                        <a:t>4.3</a:t>
+                        <a:t>4,3</a:t>
                       </a:r>
                     </a:p>
                   </a:txBody>
@@ -38276,7 +38276,7 @@
                           <a:ea typeface="+mn-ea"/>
                           <a:cs typeface="+mn-cs"/>
                         </a:rPr>
-                        <a:t>2.5</a:t>
+                        <a:t>2,5</a:t>
                       </a:r>
                     </a:p>
                   </a:txBody>
@@ -38359,7 +38359,7 @@
                           <a:ea typeface="+mn-ea"/>
                           <a:cs typeface="+mn-cs"/>
                         </a:rPr>
-                        <a:t>5.4</a:t>
+                        <a:t>5,4</a:t>
                       </a:r>
                     </a:p>
                   </a:txBody>
@@ -38442,7 +38442,7 @@
                           <a:ea typeface="+mn-ea"/>
                           <a:cs typeface="+mn-cs"/>
                         </a:rPr>
-                        <a:t>2.9</a:t>
+                        <a:t>2,9</a:t>
                       </a:r>
                     </a:p>
                   </a:txBody>
@@ -40595,7 +40595,7 @@
                   <a:schemeClr val="tx1"/>
                 </a:solidFill>
               </a:rPr>
-              <a:t>5.3</a:t>
+              <a:t>5,3</a:t>
             </a:r>
           </a:p>
         </p:txBody>
@@ -42143,7 +42143,7 @@
                   <a:schemeClr val="tx1"/>
                 </a:solidFill>
               </a:rPr>
-              <a:t>6.4</a:t>
+              <a:t>6,4</a:t>
             </a:r>
           </a:p>
         </p:txBody>
@@ -43691,7 +43691,7 @@
                   <a:schemeClr val="tx1"/>
                 </a:solidFill>
               </a:rPr>
-              <a:t>0.7</a:t>
+              <a:t>0,7</a:t>
             </a:r>
           </a:p>
         </p:txBody>
@@ -45239,7 +45239,7 @@
                   <a:schemeClr val="tx1"/>
                 </a:solidFill>
               </a:rPr>
-              <a:t>0.4</a:t>
+              <a:t>0,4</a:t>
             </a:r>
           </a:p>
         </p:txBody>
@@ -46787,7 +46787,7 @@
                   <a:schemeClr val="tx1"/>
                 </a:solidFill>
               </a:rPr>
-              <a:t>5.0</a:t>
+              <a:t>5,0</a:t>
             </a:r>
           </a:p>
         </p:txBody>
@@ -48335,7 +48335,7 @@
                   <a:schemeClr val="tx1"/>
                 </a:solidFill>
               </a:rPr>
-              <a:t>0.9</a:t>
+              <a:t>0,9</a:t>
             </a:r>
           </a:p>
         </p:txBody>
